--- a/assets/figures-editable/appendix-studies/a-e17.pptx
+++ b/assets/figures-editable/appendix-studies/a-e17.pptx
@@ -7,7 +7,7 @@
   <p:sldIdLst>
     <p:sldId id="256" r:id="rId7"/>
   </p:sldIdLst>
-  <p:sldSz cx="8961120" cy="5660136" type="screen4x3"/>
+  <p:sldSz cx="12191695" cy="6858000" type="screen4x3"/>
   <p:notesSz cx="6858000" cy="9144000"/>
   <p:defaultTextStyle>
     <a:defPPr>
@@ -3098,14 +3098,14 @@
       <p:grpSpPr/>
       <p:sp>
         <p:nvSpPr>
-          <p:cNvPr id="2" name="text 0" descr="sci-ppt:obj-000"/>
+          <p:cNvPr id="2" name="A-E17 text 0" descr="sci-ppt:o000"/>
           <p:cNvSpPr txBox="1"/>
           <p:nvPr/>
         </p:nvSpPr>
         <p:spPr>
           <a:xfrm>
-            <a:off x="256032" y="137160"/>
-            <a:ext cx="7315200" cy="310896"/>
+            <a:off x="274320" y="118872"/>
+            <a:ext cx="11612880" cy="340105"/>
           </a:xfrm>
           <a:prstGeom prst="rect">
             <a:avLst/>
@@ -3114,7 +3114,7 @@
           <a:effectLst/>
         </p:spPr>
         <p:txBody>
-          <a:bodyPr wrap="none" lIns="0" rIns="0" tIns="0" bIns="0" anchor="ctr">
+          <a:bodyPr wrap="none" lIns="18288" rIns="18288" tIns="18288" bIns="18288" anchor="t">
             <a:spAutoFit/>
           </a:bodyPr>
           <a:lstStyle/>
@@ -3125,27 +3125,115 @@
               </a:spcAft>
             </a:pPr>
             <a:r>
-              <a:rPr sz="1439" b="0" i="0">
+              <a:rPr sz="1900" b="1" i="0">
                 <a:solidFill>
                   <a:srgbClr val="8EDBD4"/>
                 </a:solidFill>
                 <a:latin typeface="Arial"/>
               </a:rPr>
-              <a:t>A-E17 · Physical variable map</a:t>
-            </a:r>
-          </a:p>
-        </p:txBody>
-      </p:sp>
-      <p:sp>
-        <p:nvSpPr>
-          <p:cNvPr id="3" name="text 1" descr="sci-ppt:obj-001"/>
+              <a:t>A-E17 · Linear constitutive check for the chosen dashpot</a:t>
+            </a:r>
+          </a:p>
+        </p:txBody>
+      </p:sp>
+      <p:cxnSp>
+        <p:nvCxnSpPr>
+          <p:cNvPr id="3" name="A-E17 line 1" descr="sci-ppt:o001"/>
+          <p:cNvCxnSpPr/>
+          <p:nvPr/>
+        </p:nvCxnSpPr>
+        <p:spPr>
+          <a:xfrm>
+            <a:off x="914400" y="5029200"/>
+            <a:ext cx="5852160" cy="0"/>
+          </a:xfrm>
+          <a:prstGeom prst="line">
+            <a:avLst/>
+          </a:prstGeom>
+          <a:ln w="19050">
+            <a:solidFill>
+              <a:srgbClr val="B4C7D2"/>
+            </a:solidFill>
+          </a:ln>
+          <a:effectLst/>
+        </p:spPr>
+      </p:cxnSp>
+      <p:cxnSp>
+        <p:nvCxnSpPr>
+          <p:cNvPr id="4" name="A-E17 line 2" descr="sci-ppt:o002"/>
+          <p:cNvCxnSpPr/>
+          <p:nvPr/>
+        </p:nvCxnSpPr>
+        <p:spPr>
+          <a:xfrm>
+            <a:off x="914400" y="1371600"/>
+            <a:ext cx="0" cy="3657600"/>
+          </a:xfrm>
+          <a:prstGeom prst="line">
+            <a:avLst/>
+          </a:prstGeom>
+          <a:ln w="19050">
+            <a:solidFill>
+              <a:srgbClr val="B4C7D2"/>
+            </a:solidFill>
+          </a:ln>
+          <a:effectLst/>
+        </p:spPr>
+      </p:cxnSp>
+      <p:cxnSp>
+        <p:nvCxnSpPr>
+          <p:cNvPr id="5" name="A-E17 line 3" descr="sci-ppt:o003"/>
+          <p:cNvCxnSpPr/>
+          <p:nvPr/>
+        </p:nvCxnSpPr>
+        <p:spPr>
+          <a:xfrm>
+            <a:off x="914400" y="5029200"/>
+            <a:ext cx="0" cy="64008"/>
+          </a:xfrm>
+          <a:prstGeom prst="line">
+            <a:avLst/>
+          </a:prstGeom>
+          <a:ln w="12700">
+            <a:solidFill>
+              <a:srgbClr val="B4C7D2"/>
+            </a:solidFill>
+          </a:ln>
+          <a:effectLst/>
+        </p:spPr>
+      </p:cxnSp>
+      <p:cxnSp>
+        <p:nvCxnSpPr>
+          <p:cNvPr id="6" name="A-E17 line 4" descr="sci-ppt:o004"/>
+          <p:cNvCxnSpPr/>
+          <p:nvPr/>
+        </p:nvCxnSpPr>
+        <p:spPr>
+          <a:xfrm>
+            <a:off x="914400" y="1371600"/>
+            <a:ext cx="0" cy="3657600"/>
+          </a:xfrm>
+          <a:prstGeom prst="line">
+            <a:avLst/>
+          </a:prstGeom>
+          <a:ln w="7620">
+            <a:solidFill>
+              <a:srgbClr val="2E4756"/>
+            </a:solidFill>
+          </a:ln>
+          <a:effectLst/>
+        </p:spPr>
+      </p:cxnSp>
+      <p:sp>
+        <p:nvSpPr>
+          <p:cNvPr id="7" name="A-E17 text 5" descr="sci-ppt:o005"/>
           <p:cNvSpPr txBox="1"/>
           <p:nvPr/>
         </p:nvSpPr>
         <p:spPr>
           <a:xfrm>
-            <a:off x="905256" y="612648"/>
-            <a:ext cx="7498079" cy="310896"/>
+            <a:off x="457200" y="5111496"/>
+            <a:ext cx="914400" cy="208407"/>
           </a:xfrm>
           <a:prstGeom prst="rect">
             <a:avLst/>
@@ -3154,7 +3242,781 @@
           <a:effectLst/>
         </p:spPr>
         <p:txBody>
-          <a:bodyPr wrap="none" lIns="0" rIns="0" tIns="0" bIns="0" anchor="ctr">
+          <a:bodyPr wrap="none" lIns="18288" rIns="18288" tIns="18288" bIns="18288" anchor="t">
+            <a:spAutoFit/>
+          </a:bodyPr>
+          <a:lstStyle/>
+          <a:p>
+            <a:pPr algn="ctr">
+              <a:spcAft>
+                <a:spcPts val="0"/>
+              </a:spcAft>
+            </a:pPr>
+            <a:r>
+              <a:rPr sz="1050" b="0" i="0">
+                <a:solidFill>
+                  <a:srgbClr val="B4C7D2"/>
+                </a:solidFill>
+                <a:latin typeface="Arial"/>
+              </a:rPr>
+              <a:t>0</a:t>
+            </a:r>
+          </a:p>
+        </p:txBody>
+      </p:sp>
+      <p:cxnSp>
+        <p:nvCxnSpPr>
+          <p:cNvPr id="8" name="A-E17 line 6" descr="sci-ppt:o006"/>
+          <p:cNvCxnSpPr/>
+          <p:nvPr/>
+        </p:nvCxnSpPr>
+        <p:spPr>
+          <a:xfrm>
+            <a:off x="2377440" y="5029200"/>
+            <a:ext cx="0" cy="64008"/>
+          </a:xfrm>
+          <a:prstGeom prst="line">
+            <a:avLst/>
+          </a:prstGeom>
+          <a:ln w="12700">
+            <a:solidFill>
+              <a:srgbClr val="B4C7D2"/>
+            </a:solidFill>
+          </a:ln>
+          <a:effectLst/>
+        </p:spPr>
+      </p:cxnSp>
+      <p:cxnSp>
+        <p:nvCxnSpPr>
+          <p:cNvPr id="9" name="A-E17 line 7" descr="sci-ppt:o007"/>
+          <p:cNvCxnSpPr/>
+          <p:nvPr/>
+        </p:nvCxnSpPr>
+        <p:spPr>
+          <a:xfrm>
+            <a:off x="2377440" y="1371600"/>
+            <a:ext cx="0" cy="3657600"/>
+          </a:xfrm>
+          <a:prstGeom prst="line">
+            <a:avLst/>
+          </a:prstGeom>
+          <a:ln w="7620">
+            <a:solidFill>
+              <a:srgbClr val="2E4756"/>
+            </a:solidFill>
+          </a:ln>
+          <a:effectLst/>
+        </p:spPr>
+      </p:cxnSp>
+      <p:sp>
+        <p:nvSpPr>
+          <p:cNvPr id="10" name="A-E17 text 8" descr="sci-ppt:o008"/>
+          <p:cNvSpPr txBox="1"/>
+          <p:nvPr/>
+        </p:nvSpPr>
+        <p:spPr>
+          <a:xfrm>
+            <a:off x="1920240" y="5111496"/>
+            <a:ext cx="914400" cy="208407"/>
+          </a:xfrm>
+          <a:prstGeom prst="rect">
+            <a:avLst/>
+          </a:prstGeom>
+          <a:noFill/>
+          <a:effectLst/>
+        </p:spPr>
+        <p:txBody>
+          <a:bodyPr wrap="none" lIns="18288" rIns="18288" tIns="18288" bIns="18288" anchor="t">
+            <a:spAutoFit/>
+          </a:bodyPr>
+          <a:lstStyle/>
+          <a:p>
+            <a:pPr algn="ctr">
+              <a:spcAft>
+                <a:spcPts val="0"/>
+              </a:spcAft>
+            </a:pPr>
+            <a:r>
+              <a:rPr sz="1050" b="0" i="0">
+                <a:solidFill>
+                  <a:srgbClr val="B4C7D2"/>
+                </a:solidFill>
+                <a:latin typeface="Arial"/>
+              </a:rPr>
+              <a:t>1</a:t>
+            </a:r>
+          </a:p>
+        </p:txBody>
+      </p:sp>
+      <p:cxnSp>
+        <p:nvCxnSpPr>
+          <p:cNvPr id="11" name="A-E17 line 9" descr="sci-ppt:o009"/>
+          <p:cNvCxnSpPr/>
+          <p:nvPr/>
+        </p:nvCxnSpPr>
+        <p:spPr>
+          <a:xfrm>
+            <a:off x="3840480" y="5029200"/>
+            <a:ext cx="0" cy="64008"/>
+          </a:xfrm>
+          <a:prstGeom prst="line">
+            <a:avLst/>
+          </a:prstGeom>
+          <a:ln w="12700">
+            <a:solidFill>
+              <a:srgbClr val="B4C7D2"/>
+            </a:solidFill>
+          </a:ln>
+          <a:effectLst/>
+        </p:spPr>
+      </p:cxnSp>
+      <p:cxnSp>
+        <p:nvCxnSpPr>
+          <p:cNvPr id="12" name="A-E17 line 10" descr="sci-ppt:o010"/>
+          <p:cNvCxnSpPr/>
+          <p:nvPr/>
+        </p:nvCxnSpPr>
+        <p:spPr>
+          <a:xfrm>
+            <a:off x="3840480" y="1371600"/>
+            <a:ext cx="0" cy="3657600"/>
+          </a:xfrm>
+          <a:prstGeom prst="line">
+            <a:avLst/>
+          </a:prstGeom>
+          <a:ln w="7620">
+            <a:solidFill>
+              <a:srgbClr val="2E4756"/>
+            </a:solidFill>
+          </a:ln>
+          <a:effectLst/>
+        </p:spPr>
+      </p:cxnSp>
+      <p:sp>
+        <p:nvSpPr>
+          <p:cNvPr id="13" name="A-E17 text 11" descr="sci-ppt:o011"/>
+          <p:cNvSpPr txBox="1"/>
+          <p:nvPr/>
+        </p:nvSpPr>
+        <p:spPr>
+          <a:xfrm>
+            <a:off x="3383280" y="5111496"/>
+            <a:ext cx="914400" cy="208407"/>
+          </a:xfrm>
+          <a:prstGeom prst="rect">
+            <a:avLst/>
+          </a:prstGeom>
+          <a:noFill/>
+          <a:effectLst/>
+        </p:spPr>
+        <p:txBody>
+          <a:bodyPr wrap="none" lIns="18288" rIns="18288" tIns="18288" bIns="18288" anchor="t">
+            <a:spAutoFit/>
+          </a:bodyPr>
+          <a:lstStyle/>
+          <a:p>
+            <a:pPr algn="ctr">
+              <a:spcAft>
+                <a:spcPts val="0"/>
+              </a:spcAft>
+            </a:pPr>
+            <a:r>
+              <a:rPr sz="1050" b="0" i="0">
+                <a:solidFill>
+                  <a:srgbClr val="B4C7D2"/>
+                </a:solidFill>
+                <a:latin typeface="Arial"/>
+              </a:rPr>
+              <a:t>2</a:t>
+            </a:r>
+          </a:p>
+        </p:txBody>
+      </p:sp>
+      <p:cxnSp>
+        <p:nvCxnSpPr>
+          <p:cNvPr id="14" name="A-E17 line 12" descr="sci-ppt:o012"/>
+          <p:cNvCxnSpPr/>
+          <p:nvPr/>
+        </p:nvCxnSpPr>
+        <p:spPr>
+          <a:xfrm>
+            <a:off x="5303520" y="5029200"/>
+            <a:ext cx="0" cy="64008"/>
+          </a:xfrm>
+          <a:prstGeom prst="line">
+            <a:avLst/>
+          </a:prstGeom>
+          <a:ln w="12700">
+            <a:solidFill>
+              <a:srgbClr val="B4C7D2"/>
+            </a:solidFill>
+          </a:ln>
+          <a:effectLst/>
+        </p:spPr>
+      </p:cxnSp>
+      <p:cxnSp>
+        <p:nvCxnSpPr>
+          <p:cNvPr id="15" name="A-E17 line 13" descr="sci-ppt:o013"/>
+          <p:cNvCxnSpPr/>
+          <p:nvPr/>
+        </p:nvCxnSpPr>
+        <p:spPr>
+          <a:xfrm>
+            <a:off x="5303520" y="1371600"/>
+            <a:ext cx="0" cy="3657600"/>
+          </a:xfrm>
+          <a:prstGeom prst="line">
+            <a:avLst/>
+          </a:prstGeom>
+          <a:ln w="7620">
+            <a:solidFill>
+              <a:srgbClr val="2E4756"/>
+            </a:solidFill>
+          </a:ln>
+          <a:effectLst/>
+        </p:spPr>
+      </p:cxnSp>
+      <p:sp>
+        <p:nvSpPr>
+          <p:cNvPr id="16" name="A-E17 text 14" descr="sci-ppt:o014"/>
+          <p:cNvSpPr txBox="1"/>
+          <p:nvPr/>
+        </p:nvSpPr>
+        <p:spPr>
+          <a:xfrm>
+            <a:off x="4846320" y="5111496"/>
+            <a:ext cx="914400" cy="208407"/>
+          </a:xfrm>
+          <a:prstGeom prst="rect">
+            <a:avLst/>
+          </a:prstGeom>
+          <a:noFill/>
+          <a:effectLst/>
+        </p:spPr>
+        <p:txBody>
+          <a:bodyPr wrap="none" lIns="18288" rIns="18288" tIns="18288" bIns="18288" anchor="t">
+            <a:spAutoFit/>
+          </a:bodyPr>
+          <a:lstStyle/>
+          <a:p>
+            <a:pPr algn="ctr">
+              <a:spcAft>
+                <a:spcPts val="0"/>
+              </a:spcAft>
+            </a:pPr>
+            <a:r>
+              <a:rPr sz="1050" b="0" i="0">
+                <a:solidFill>
+                  <a:srgbClr val="B4C7D2"/>
+                </a:solidFill>
+                <a:latin typeface="Arial"/>
+              </a:rPr>
+              <a:t>3</a:t>
+            </a:r>
+          </a:p>
+        </p:txBody>
+      </p:sp>
+      <p:cxnSp>
+        <p:nvCxnSpPr>
+          <p:cNvPr id="17" name="A-E17 line 15" descr="sci-ppt:o015"/>
+          <p:cNvCxnSpPr/>
+          <p:nvPr/>
+        </p:nvCxnSpPr>
+        <p:spPr>
+          <a:xfrm>
+            <a:off x="6766560" y="5029200"/>
+            <a:ext cx="0" cy="64008"/>
+          </a:xfrm>
+          <a:prstGeom prst="line">
+            <a:avLst/>
+          </a:prstGeom>
+          <a:ln w="12700">
+            <a:solidFill>
+              <a:srgbClr val="B4C7D2"/>
+            </a:solidFill>
+          </a:ln>
+          <a:effectLst/>
+        </p:spPr>
+      </p:cxnSp>
+      <p:cxnSp>
+        <p:nvCxnSpPr>
+          <p:cNvPr id="18" name="A-E17 line 16" descr="sci-ppt:o016"/>
+          <p:cNvCxnSpPr/>
+          <p:nvPr/>
+        </p:nvCxnSpPr>
+        <p:spPr>
+          <a:xfrm>
+            <a:off x="6766560" y="1371600"/>
+            <a:ext cx="0" cy="3657600"/>
+          </a:xfrm>
+          <a:prstGeom prst="line">
+            <a:avLst/>
+          </a:prstGeom>
+          <a:ln w="7620">
+            <a:solidFill>
+              <a:srgbClr val="2E4756"/>
+            </a:solidFill>
+          </a:ln>
+          <a:effectLst/>
+        </p:spPr>
+      </p:cxnSp>
+      <p:sp>
+        <p:nvSpPr>
+          <p:cNvPr id="19" name="A-E17 text 17" descr="sci-ppt:o017"/>
+          <p:cNvSpPr txBox="1"/>
+          <p:nvPr/>
+        </p:nvSpPr>
+        <p:spPr>
+          <a:xfrm>
+            <a:off x="6309360" y="5111496"/>
+            <a:ext cx="914400" cy="208407"/>
+          </a:xfrm>
+          <a:prstGeom prst="rect">
+            <a:avLst/>
+          </a:prstGeom>
+          <a:noFill/>
+          <a:effectLst/>
+        </p:spPr>
+        <p:txBody>
+          <a:bodyPr wrap="none" lIns="18288" rIns="18288" tIns="18288" bIns="18288" anchor="t">
+            <a:spAutoFit/>
+          </a:bodyPr>
+          <a:lstStyle/>
+          <a:p>
+            <a:pPr algn="ctr">
+              <a:spcAft>
+                <a:spcPts val="0"/>
+              </a:spcAft>
+            </a:pPr>
+            <a:r>
+              <a:rPr sz="1050" b="0" i="0">
+                <a:solidFill>
+                  <a:srgbClr val="B4C7D2"/>
+                </a:solidFill>
+                <a:latin typeface="Arial"/>
+              </a:rPr>
+              <a:t>4</a:t>
+            </a:r>
+          </a:p>
+        </p:txBody>
+      </p:sp>
+      <p:cxnSp>
+        <p:nvCxnSpPr>
+          <p:cNvPr id="20" name="A-E17 line 18" descr="sci-ppt:o018"/>
+          <p:cNvCxnSpPr/>
+          <p:nvPr/>
+        </p:nvCxnSpPr>
+        <p:spPr>
+          <a:xfrm>
+            <a:off x="850392" y="5029200"/>
+            <a:ext cx="64008" cy="0"/>
+          </a:xfrm>
+          <a:prstGeom prst="line">
+            <a:avLst/>
+          </a:prstGeom>
+          <a:ln w="12700">
+            <a:solidFill>
+              <a:srgbClr val="B4C7D2"/>
+            </a:solidFill>
+          </a:ln>
+          <a:effectLst/>
+        </p:spPr>
+      </p:cxnSp>
+      <p:cxnSp>
+        <p:nvCxnSpPr>
+          <p:cNvPr id="21" name="A-E17 line 19" descr="sci-ppt:o019"/>
+          <p:cNvCxnSpPr/>
+          <p:nvPr/>
+        </p:nvCxnSpPr>
+        <p:spPr>
+          <a:xfrm>
+            <a:off x="850392" y="4158342"/>
+            <a:ext cx="64008" cy="0"/>
+          </a:xfrm>
+          <a:prstGeom prst="line">
+            <a:avLst/>
+          </a:prstGeom>
+          <a:ln w="12700">
+            <a:solidFill>
+              <a:srgbClr val="B4C7D2"/>
+            </a:solidFill>
+          </a:ln>
+          <a:effectLst/>
+        </p:spPr>
+      </p:cxnSp>
+      <p:cxnSp>
+        <p:nvCxnSpPr>
+          <p:cNvPr id="22" name="A-E17 line 20" descr="sci-ppt:o020"/>
+          <p:cNvCxnSpPr/>
+          <p:nvPr/>
+        </p:nvCxnSpPr>
+        <p:spPr>
+          <a:xfrm>
+            <a:off x="914400" y="4158342"/>
+            <a:ext cx="5852160" cy="0"/>
+          </a:xfrm>
+          <a:prstGeom prst="line">
+            <a:avLst/>
+          </a:prstGeom>
+          <a:ln w="7620">
+            <a:solidFill>
+              <a:srgbClr val="2E4756"/>
+            </a:solidFill>
+          </a:ln>
+          <a:effectLst/>
+        </p:spPr>
+      </p:cxnSp>
+      <p:sp>
+        <p:nvSpPr>
+          <p:cNvPr id="23" name="A-E17 text 21" descr="sci-ppt:o021"/>
+          <p:cNvSpPr txBox="1"/>
+          <p:nvPr/>
+        </p:nvSpPr>
+        <p:spPr>
+          <a:xfrm>
+            <a:off x="45720" y="4076046"/>
+            <a:ext cx="777240" cy="208407"/>
+          </a:xfrm>
+          <a:prstGeom prst="rect">
+            <a:avLst/>
+          </a:prstGeom>
+          <a:noFill/>
+          <a:effectLst/>
+        </p:spPr>
+        <p:txBody>
+          <a:bodyPr wrap="none" lIns="18288" rIns="18288" tIns="18288" bIns="18288" anchor="t">
+            <a:spAutoFit/>
+          </a:bodyPr>
+          <a:lstStyle/>
+          <a:p>
+            <a:pPr algn="r">
+              <a:spcAft>
+                <a:spcPts val="0"/>
+              </a:spcAft>
+            </a:pPr>
+            <a:r>
+              <a:rPr sz="1050" b="0" i="0">
+                <a:solidFill>
+                  <a:srgbClr val="B4C7D2"/>
+                </a:solidFill>
+                <a:latin typeface="Arial"/>
+              </a:rPr>
+              <a:t>0.25</a:t>
+            </a:r>
+          </a:p>
+        </p:txBody>
+      </p:sp>
+      <p:cxnSp>
+        <p:nvCxnSpPr>
+          <p:cNvPr id="24" name="A-E17 line 22" descr="sci-ppt:o022"/>
+          <p:cNvCxnSpPr/>
+          <p:nvPr/>
+        </p:nvCxnSpPr>
+        <p:spPr>
+          <a:xfrm>
+            <a:off x="850392" y="3287485"/>
+            <a:ext cx="64008" cy="0"/>
+          </a:xfrm>
+          <a:prstGeom prst="line">
+            <a:avLst/>
+          </a:prstGeom>
+          <a:ln w="12700">
+            <a:solidFill>
+              <a:srgbClr val="B4C7D2"/>
+            </a:solidFill>
+          </a:ln>
+          <a:effectLst/>
+        </p:spPr>
+      </p:cxnSp>
+      <p:cxnSp>
+        <p:nvCxnSpPr>
+          <p:cNvPr id="25" name="A-E17 line 23" descr="sci-ppt:o023"/>
+          <p:cNvCxnSpPr/>
+          <p:nvPr/>
+        </p:nvCxnSpPr>
+        <p:spPr>
+          <a:xfrm>
+            <a:off x="914400" y="3287485"/>
+            <a:ext cx="5852160" cy="0"/>
+          </a:xfrm>
+          <a:prstGeom prst="line">
+            <a:avLst/>
+          </a:prstGeom>
+          <a:ln w="7620">
+            <a:solidFill>
+              <a:srgbClr val="2E4756"/>
+            </a:solidFill>
+          </a:ln>
+          <a:effectLst/>
+        </p:spPr>
+      </p:cxnSp>
+      <p:sp>
+        <p:nvSpPr>
+          <p:cNvPr id="26" name="A-E17 text 24" descr="sci-ppt:o024"/>
+          <p:cNvSpPr txBox="1"/>
+          <p:nvPr/>
+        </p:nvSpPr>
+        <p:spPr>
+          <a:xfrm>
+            <a:off x="45720" y="3205189"/>
+            <a:ext cx="777240" cy="208407"/>
+          </a:xfrm>
+          <a:prstGeom prst="rect">
+            <a:avLst/>
+          </a:prstGeom>
+          <a:noFill/>
+          <a:effectLst/>
+        </p:spPr>
+        <p:txBody>
+          <a:bodyPr wrap="none" lIns="18288" rIns="18288" tIns="18288" bIns="18288" anchor="t">
+            <a:spAutoFit/>
+          </a:bodyPr>
+          <a:lstStyle/>
+          <a:p>
+            <a:pPr algn="r">
+              <a:spcAft>
+                <a:spcPts val="0"/>
+              </a:spcAft>
+            </a:pPr>
+            <a:r>
+              <a:rPr sz="1050" b="0" i="0">
+                <a:solidFill>
+                  <a:srgbClr val="B4C7D2"/>
+                </a:solidFill>
+                <a:latin typeface="Arial"/>
+              </a:rPr>
+              <a:t>0.50</a:t>
+            </a:r>
+          </a:p>
+        </p:txBody>
+      </p:sp>
+      <p:cxnSp>
+        <p:nvCxnSpPr>
+          <p:cNvPr id="27" name="A-E17 line 25" descr="sci-ppt:o025"/>
+          <p:cNvCxnSpPr/>
+          <p:nvPr/>
+        </p:nvCxnSpPr>
+        <p:spPr>
+          <a:xfrm>
+            <a:off x="850392" y="2416628"/>
+            <a:ext cx="64008" cy="0"/>
+          </a:xfrm>
+          <a:prstGeom prst="line">
+            <a:avLst/>
+          </a:prstGeom>
+          <a:ln w="12700">
+            <a:solidFill>
+              <a:srgbClr val="B4C7D2"/>
+            </a:solidFill>
+          </a:ln>
+          <a:effectLst/>
+        </p:spPr>
+      </p:cxnSp>
+      <p:cxnSp>
+        <p:nvCxnSpPr>
+          <p:cNvPr id="28" name="A-E17 line 26" descr="sci-ppt:o026"/>
+          <p:cNvCxnSpPr/>
+          <p:nvPr/>
+        </p:nvCxnSpPr>
+        <p:spPr>
+          <a:xfrm>
+            <a:off x="914400" y="2416628"/>
+            <a:ext cx="5852160" cy="0"/>
+          </a:xfrm>
+          <a:prstGeom prst="line">
+            <a:avLst/>
+          </a:prstGeom>
+          <a:ln w="7620">
+            <a:solidFill>
+              <a:srgbClr val="2E4756"/>
+            </a:solidFill>
+          </a:ln>
+          <a:effectLst/>
+        </p:spPr>
+      </p:cxnSp>
+      <p:sp>
+        <p:nvSpPr>
+          <p:cNvPr id="29" name="A-E17 text 27" descr="sci-ppt:o027"/>
+          <p:cNvSpPr txBox="1"/>
+          <p:nvPr/>
+        </p:nvSpPr>
+        <p:spPr>
+          <a:xfrm>
+            <a:off x="45720" y="2334332"/>
+            <a:ext cx="777240" cy="208407"/>
+          </a:xfrm>
+          <a:prstGeom prst="rect">
+            <a:avLst/>
+          </a:prstGeom>
+          <a:noFill/>
+          <a:effectLst/>
+        </p:spPr>
+        <p:txBody>
+          <a:bodyPr wrap="none" lIns="18288" rIns="18288" tIns="18288" bIns="18288" anchor="t">
+            <a:spAutoFit/>
+          </a:bodyPr>
+          <a:lstStyle/>
+          <a:p>
+            <a:pPr algn="r">
+              <a:spcAft>
+                <a:spcPts val="0"/>
+              </a:spcAft>
+            </a:pPr>
+            <a:r>
+              <a:rPr sz="1050" b="0" i="0">
+                <a:solidFill>
+                  <a:srgbClr val="B4C7D2"/>
+                </a:solidFill>
+                <a:latin typeface="Arial"/>
+              </a:rPr>
+              <a:t>0.75</a:t>
+            </a:r>
+          </a:p>
+        </p:txBody>
+      </p:sp>
+      <p:cxnSp>
+        <p:nvCxnSpPr>
+          <p:cNvPr id="30" name="A-E17 line 28" descr="sci-ppt:o028"/>
+          <p:cNvCxnSpPr/>
+          <p:nvPr/>
+        </p:nvCxnSpPr>
+        <p:spPr>
+          <a:xfrm>
+            <a:off x="850392" y="1545771"/>
+            <a:ext cx="64008" cy="0"/>
+          </a:xfrm>
+          <a:prstGeom prst="line">
+            <a:avLst/>
+          </a:prstGeom>
+          <a:ln w="12700">
+            <a:solidFill>
+              <a:srgbClr val="B4C7D2"/>
+            </a:solidFill>
+          </a:ln>
+          <a:effectLst/>
+        </p:spPr>
+      </p:cxnSp>
+      <p:cxnSp>
+        <p:nvCxnSpPr>
+          <p:cNvPr id="31" name="A-E17 line 29" descr="sci-ppt:o029"/>
+          <p:cNvCxnSpPr/>
+          <p:nvPr/>
+        </p:nvCxnSpPr>
+        <p:spPr>
+          <a:xfrm>
+            <a:off x="914400" y="1545771"/>
+            <a:ext cx="5852160" cy="0"/>
+          </a:xfrm>
+          <a:prstGeom prst="line">
+            <a:avLst/>
+          </a:prstGeom>
+          <a:ln w="7620">
+            <a:solidFill>
+              <a:srgbClr val="2E4756"/>
+            </a:solidFill>
+          </a:ln>
+          <a:effectLst/>
+        </p:spPr>
+      </p:cxnSp>
+      <p:sp>
+        <p:nvSpPr>
+          <p:cNvPr id="32" name="A-E17 text 30" descr="sci-ppt:o030"/>
+          <p:cNvSpPr txBox="1"/>
+          <p:nvPr/>
+        </p:nvSpPr>
+        <p:spPr>
+          <a:xfrm>
+            <a:off x="45720" y="1463475"/>
+            <a:ext cx="777240" cy="208407"/>
+          </a:xfrm>
+          <a:prstGeom prst="rect">
+            <a:avLst/>
+          </a:prstGeom>
+          <a:noFill/>
+          <a:effectLst/>
+        </p:spPr>
+        <p:txBody>
+          <a:bodyPr wrap="none" lIns="18288" rIns="18288" tIns="18288" bIns="18288" anchor="t">
+            <a:spAutoFit/>
+          </a:bodyPr>
+          <a:lstStyle/>
+          <a:p>
+            <a:pPr algn="r">
+              <a:spcAft>
+                <a:spcPts val="0"/>
+              </a:spcAft>
+            </a:pPr>
+            <a:r>
+              <a:rPr sz="1050" b="0" i="0">
+                <a:solidFill>
+                  <a:srgbClr val="B4C7D2"/>
+                </a:solidFill>
+                <a:latin typeface="Arial"/>
+              </a:rPr>
+              <a:t>1.00</a:t>
+            </a:r>
+          </a:p>
+        </p:txBody>
+      </p:sp>
+      <p:sp>
+        <p:nvSpPr>
+          <p:cNvPr id="33" name="A-E17 text 31" descr="sci-ppt:o031"/>
+          <p:cNvSpPr txBox="1"/>
+          <p:nvPr/>
+        </p:nvSpPr>
+        <p:spPr>
+          <a:xfrm>
+            <a:off x="914400" y="5312664"/>
+            <a:ext cx="5852160" cy="231648"/>
+          </a:xfrm>
+          <a:prstGeom prst="rect">
+            <a:avLst/>
+          </a:prstGeom>
+          <a:noFill/>
+          <a:effectLst/>
+        </p:spPr>
+        <p:txBody>
+          <a:bodyPr wrap="none" lIns="18288" rIns="18288" tIns="18288" bIns="18288" anchor="t">
+            <a:spAutoFit/>
+          </a:bodyPr>
+          <a:lstStyle/>
+          <a:p>
+            <a:pPr algn="ctr">
+              <a:spcAft>
+                <a:spcPts val="0"/>
+              </a:spcAft>
+            </a:pPr>
+            <a:r>
+              <a:rPr sz="1200" b="0" i="0">
+                <a:solidFill>
+                  <a:srgbClr val="E7F0F3"/>
+                </a:solidFill>
+                <a:latin typeface="Arial"/>
+              </a:rPr>
+              <a:t>time  t / τ_KV</a:t>
+            </a:r>
+          </a:p>
+        </p:txBody>
+      </p:sp>
+      <p:sp>
+        <p:nvSpPr>
+          <p:cNvPr id="34" name="A-E17 text 32" descr="sci-ppt:o032"/>
+          <p:cNvSpPr txBox="1"/>
+          <p:nvPr/>
+        </p:nvSpPr>
+        <p:spPr>
+          <a:xfrm>
+            <a:off x="365760" y="1024128"/>
+            <a:ext cx="5852160" cy="231648"/>
+          </a:xfrm>
+          <a:prstGeom prst="rect">
+            <a:avLst/>
+          </a:prstGeom>
+          <a:noFill/>
+          <a:effectLst/>
+        </p:spPr>
+        <p:txBody>
+          <a:bodyPr wrap="none" lIns="18288" rIns="18288" tIns="18288" bIns="18288" anchor="t">
             <a:spAutoFit/>
           </a:bodyPr>
           <a:lstStyle/>
@@ -3165,37 +4027,646 @@
               </a:spcAft>
             </a:pPr>
             <a:r>
-              <a:rPr sz="1296" b="0" i="0">
+              <a:rPr sz="1200" b="0" i="0">
                 <a:solidFill>
                   <a:srgbClr val="E7F0F3"/>
                 </a:solidFill>
                 <a:latin typeface="Arial"/>
               </a:rPr>
-              <a:t>Response times and dimensionless comparisons</a:t>
-            </a:r>
-          </a:p>
-        </p:txBody>
-      </p:sp>
-      <p:sp>
-        <p:nvSpPr>
-          <p:cNvPr id="4" name="rect 2" descr="sci-ppt:obj-002"/>
+              <a:t>γ(t) / γ₀</a:t>
+            </a:r>
+          </a:p>
+        </p:txBody>
+      </p:sp>
+      <p:sp>
+        <p:nvSpPr>
+          <p:cNvPr id="35" name="A-E17 polygon 33" descr="sci-ppt:o033"/>
           <p:cNvSpPr/>
           <p:nvPr/>
         </p:nvSpPr>
         <p:spPr>
           <a:xfrm>
-            <a:off x="996696" y="1069848"/>
-            <a:ext cx="6766560" cy="347472"/>
+            <a:off x="914400" y="1545771"/>
+            <a:ext cx="5852160" cy="3419627"/>
+          </a:xfrm>
+          <a:custGeom>
+            <a:avLst/>
+            <a:gdLst/>
+            <a:ahLst/>
+            <a:cxnLst/>
+            <a:rect l="l" t="t" r="r" b="b"/>
+            <a:pathLst>
+              <a:path w="5852160" h="3419627">
+                <a:moveTo>
+                  <a:pt x="0" y="0"/>
+                </a:moveTo>
+                <a:lnTo>
+                  <a:pt x="39144" y="91966"/>
+                </a:lnTo>
+                <a:lnTo>
+                  <a:pt x="78289" y="181505"/>
+                </a:lnTo>
+                <a:lnTo>
+                  <a:pt x="117434" y="268679"/>
+                </a:lnTo>
+                <a:lnTo>
+                  <a:pt x="156579" y="353552"/>
+                </a:lnTo>
+                <a:lnTo>
+                  <a:pt x="195724" y="436184"/>
+                </a:lnTo>
+                <a:lnTo>
+                  <a:pt x="234869" y="516634"/>
+                </a:lnTo>
+                <a:lnTo>
+                  <a:pt x="274014" y="594961"/>
+                </a:lnTo>
+                <a:lnTo>
+                  <a:pt x="313159" y="671220"/>
+                </a:lnTo>
+                <a:lnTo>
+                  <a:pt x="352303" y="745465"/>
+                </a:lnTo>
+                <a:lnTo>
+                  <a:pt x="391448" y="817750"/>
+                </a:lnTo>
+                <a:lnTo>
+                  <a:pt x="430593" y="888127"/>
+                </a:lnTo>
+                <a:lnTo>
+                  <a:pt x="469738" y="956646"/>
+                </a:lnTo>
+                <a:lnTo>
+                  <a:pt x="508883" y="1023356"/>
+                </a:lnTo>
+                <a:lnTo>
+                  <a:pt x="548028" y="1088304"/>
+                </a:lnTo>
+                <a:lnTo>
+                  <a:pt x="587173" y="1151538"/>
+                </a:lnTo>
+                <a:lnTo>
+                  <a:pt x="626318" y="1213103"/>
+                </a:lnTo>
+                <a:lnTo>
+                  <a:pt x="665463" y="1273042"/>
+                </a:lnTo>
+                <a:lnTo>
+                  <a:pt x="704607" y="1331398"/>
+                </a:lnTo>
+                <a:lnTo>
+                  <a:pt x="743752" y="1388214"/>
+                </a:lnTo>
+                <a:lnTo>
+                  <a:pt x="782897" y="1443530"/>
+                </a:lnTo>
+                <a:lnTo>
+                  <a:pt x="822042" y="1497386"/>
+                </a:lnTo>
+                <a:lnTo>
+                  <a:pt x="861187" y="1549819"/>
+                </a:lnTo>
+                <a:lnTo>
+                  <a:pt x="900332" y="1600869"/>
+                </a:lnTo>
+                <a:lnTo>
+                  <a:pt x="939477" y="1650570"/>
+                </a:lnTo>
+                <a:lnTo>
+                  <a:pt x="978622" y="1698960"/>
+                </a:lnTo>
+                <a:lnTo>
+                  <a:pt x="1017766" y="1746072"/>
+                </a:lnTo>
+                <a:lnTo>
+                  <a:pt x="1056911" y="1791940"/>
+                </a:lnTo>
+                <a:lnTo>
+                  <a:pt x="1096056" y="1836597"/>
+                </a:lnTo>
+                <a:lnTo>
+                  <a:pt x="1135201" y="1880075"/>
+                </a:lnTo>
+                <a:lnTo>
+                  <a:pt x="1174346" y="1922405"/>
+                </a:lnTo>
+                <a:lnTo>
+                  <a:pt x="1213491" y="1963618"/>
+                </a:lnTo>
+                <a:lnTo>
+                  <a:pt x="1252636" y="2003743"/>
+                </a:lnTo>
+                <a:lnTo>
+                  <a:pt x="1291781" y="2042808"/>
+                </a:lnTo>
+                <a:lnTo>
+                  <a:pt x="1330926" y="2080842"/>
+                </a:lnTo>
+                <a:lnTo>
+                  <a:pt x="1370070" y="2117872"/>
+                </a:lnTo>
+                <a:lnTo>
+                  <a:pt x="1409215" y="2153924"/>
+                </a:lnTo>
+                <a:lnTo>
+                  <a:pt x="1448360" y="2189024"/>
+                </a:lnTo>
+                <a:lnTo>
+                  <a:pt x="1487505" y="2223198"/>
+                </a:lnTo>
+                <a:lnTo>
+                  <a:pt x="1526650" y="2256469"/>
+                </a:lnTo>
+                <a:lnTo>
+                  <a:pt x="1565795" y="2288863"/>
+                </a:lnTo>
+                <a:lnTo>
+                  <a:pt x="1604940" y="2320400"/>
+                </a:lnTo>
+                <a:lnTo>
+                  <a:pt x="1644085" y="2351106"/>
+                </a:lnTo>
+                <a:lnTo>
+                  <a:pt x="1683229" y="2381000"/>
+                </a:lnTo>
+                <a:lnTo>
+                  <a:pt x="1722374" y="2410105"/>
+                </a:lnTo>
+                <a:lnTo>
+                  <a:pt x="1761519" y="2438442"/>
+                </a:lnTo>
+                <a:lnTo>
+                  <a:pt x="1800664" y="2466031"/>
+                </a:lnTo>
+                <a:lnTo>
+                  <a:pt x="1839809" y="2492891"/>
+                </a:lnTo>
+                <a:lnTo>
+                  <a:pt x="1878954" y="2519043"/>
+                </a:lnTo>
+                <a:lnTo>
+                  <a:pt x="1918099" y="2544504"/>
+                </a:lnTo>
+                <a:lnTo>
+                  <a:pt x="1957244" y="2569292"/>
+                </a:lnTo>
+                <a:lnTo>
+                  <a:pt x="1996389" y="2593426"/>
+                </a:lnTo>
+                <a:lnTo>
+                  <a:pt x="2035533" y="2616923"/>
+                </a:lnTo>
+                <a:lnTo>
+                  <a:pt x="2074678" y="2639800"/>
+                </a:lnTo>
+                <a:lnTo>
+                  <a:pt x="2113823" y="2662073"/>
+                </a:lnTo>
+                <a:lnTo>
+                  <a:pt x="2152968" y="2683757"/>
+                </a:lnTo>
+                <a:lnTo>
+                  <a:pt x="2192113" y="2704870"/>
+                </a:lnTo>
+                <a:lnTo>
+                  <a:pt x="2231258" y="2725424"/>
+                </a:lnTo>
+                <a:lnTo>
+                  <a:pt x="2270403" y="2745437"/>
+                </a:lnTo>
+                <a:lnTo>
+                  <a:pt x="2309548" y="2764920"/>
+                </a:lnTo>
+                <a:lnTo>
+                  <a:pt x="2348692" y="2783890"/>
+                </a:lnTo>
+                <a:lnTo>
+                  <a:pt x="2387837" y="2802358"/>
+                </a:lnTo>
+                <a:lnTo>
+                  <a:pt x="2426982" y="2820339"/>
+                </a:lnTo>
+                <a:lnTo>
+                  <a:pt x="2466127" y="2837846"/>
+                </a:lnTo>
+                <a:lnTo>
+                  <a:pt x="2505272" y="2854890"/>
+                </a:lnTo>
+                <a:lnTo>
+                  <a:pt x="2544417" y="2871484"/>
+                </a:lnTo>
+                <a:lnTo>
+                  <a:pt x="2583562" y="2887640"/>
+                </a:lnTo>
+                <a:lnTo>
+                  <a:pt x="2622707" y="2903369"/>
+                </a:lnTo>
+                <a:lnTo>
+                  <a:pt x="2661852" y="2918683"/>
+                </a:lnTo>
+                <a:lnTo>
+                  <a:pt x="2700996" y="2933593"/>
+                </a:lnTo>
+                <a:lnTo>
+                  <a:pt x="2740141" y="2948110"/>
+                </a:lnTo>
+                <a:lnTo>
+                  <a:pt x="2779286" y="2962243"/>
+                </a:lnTo>
+                <a:lnTo>
+                  <a:pt x="2818431" y="2976002"/>
+                </a:lnTo>
+                <a:lnTo>
+                  <a:pt x="2857576" y="2989399"/>
+                </a:lnTo>
+                <a:lnTo>
+                  <a:pt x="2896721" y="3002442"/>
+                </a:lnTo>
+                <a:lnTo>
+                  <a:pt x="2935866" y="3015141"/>
+                </a:lnTo>
+                <a:lnTo>
+                  <a:pt x="2975011" y="3027504"/>
+                </a:lnTo>
+                <a:lnTo>
+                  <a:pt x="3014155" y="3039541"/>
+                </a:lnTo>
+                <a:lnTo>
+                  <a:pt x="3053300" y="3051260"/>
+                </a:lnTo>
+                <a:lnTo>
+                  <a:pt x="3092445" y="3062670"/>
+                </a:lnTo>
+                <a:lnTo>
+                  <a:pt x="3131590" y="3073778"/>
+                </a:lnTo>
+                <a:lnTo>
+                  <a:pt x="3170735" y="3084593"/>
+                </a:lnTo>
+                <a:lnTo>
+                  <a:pt x="3209880" y="3095123"/>
+                </a:lnTo>
+                <a:lnTo>
+                  <a:pt x="3249025" y="3105375"/>
+                </a:lnTo>
+                <a:lnTo>
+                  <a:pt x="3288170" y="3115356"/>
+                </a:lnTo>
+                <a:lnTo>
+                  <a:pt x="3327315" y="3125073"/>
+                </a:lnTo>
+                <a:lnTo>
+                  <a:pt x="3366459" y="3134534"/>
+                </a:lnTo>
+                <a:lnTo>
+                  <a:pt x="3405604" y="3143745"/>
+                </a:lnTo>
+                <a:lnTo>
+                  <a:pt x="3444749" y="3152713"/>
+                </a:lnTo>
+                <a:lnTo>
+                  <a:pt x="3483894" y="3161445"/>
+                </a:lnTo>
+                <a:lnTo>
+                  <a:pt x="3523039" y="3169945"/>
+                </a:lnTo>
+                <a:lnTo>
+                  <a:pt x="3562184" y="3178222"/>
+                </a:lnTo>
+                <a:lnTo>
+                  <a:pt x="3601329" y="3186279"/>
+                </a:lnTo>
+                <a:lnTo>
+                  <a:pt x="3640474" y="3194125"/>
+                </a:lnTo>
+                <a:lnTo>
+                  <a:pt x="3679618" y="3201762"/>
+                </a:lnTo>
+                <a:lnTo>
+                  <a:pt x="3718763" y="3209199"/>
+                </a:lnTo>
+                <a:lnTo>
+                  <a:pt x="3757908" y="3216439"/>
+                </a:lnTo>
+                <a:lnTo>
+                  <a:pt x="3797053" y="3223488"/>
+                </a:lnTo>
+                <a:lnTo>
+                  <a:pt x="3836198" y="3230350"/>
+                </a:lnTo>
+                <a:lnTo>
+                  <a:pt x="3875343" y="3237032"/>
+                </a:lnTo>
+                <a:lnTo>
+                  <a:pt x="3914488" y="3243537"/>
+                </a:lnTo>
+                <a:lnTo>
+                  <a:pt x="3953633" y="3249870"/>
+                </a:lnTo>
+                <a:lnTo>
+                  <a:pt x="3992778" y="3256037"/>
+                </a:lnTo>
+                <a:lnTo>
+                  <a:pt x="4031922" y="3262040"/>
+                </a:lnTo>
+                <a:lnTo>
+                  <a:pt x="4071067" y="3267885"/>
+                </a:lnTo>
+                <a:lnTo>
+                  <a:pt x="4110212" y="3273575"/>
+                </a:lnTo>
+                <a:lnTo>
+                  <a:pt x="4149357" y="3279116"/>
+                </a:lnTo>
+                <a:lnTo>
+                  <a:pt x="4188502" y="3284510"/>
+                </a:lnTo>
+                <a:lnTo>
+                  <a:pt x="4227647" y="3289761"/>
+                </a:lnTo>
+                <a:lnTo>
+                  <a:pt x="4266792" y="3294875"/>
+                </a:lnTo>
+                <a:lnTo>
+                  <a:pt x="4305937" y="3299853"/>
+                </a:lnTo>
+                <a:lnTo>
+                  <a:pt x="4345082" y="3304699"/>
+                </a:lnTo>
+                <a:lnTo>
+                  <a:pt x="4384226" y="3309418"/>
+                </a:lnTo>
+                <a:lnTo>
+                  <a:pt x="4423371" y="3314012"/>
+                </a:lnTo>
+                <a:lnTo>
+                  <a:pt x="4462516" y="3318485"/>
+                </a:lnTo>
+                <a:lnTo>
+                  <a:pt x="4501661" y="3322839"/>
+                </a:lnTo>
+                <a:lnTo>
+                  <a:pt x="4540806" y="3327079"/>
+                </a:lnTo>
+                <a:lnTo>
+                  <a:pt x="4579951" y="3331207"/>
+                </a:lnTo>
+                <a:lnTo>
+                  <a:pt x="4619096" y="3335226"/>
+                </a:lnTo>
+                <a:lnTo>
+                  <a:pt x="4658241" y="3339138"/>
+                </a:lnTo>
+                <a:lnTo>
+                  <a:pt x="4697385" y="3342948"/>
+                </a:lnTo>
+                <a:lnTo>
+                  <a:pt x="4736530" y="3346657"/>
+                </a:lnTo>
+                <a:lnTo>
+                  <a:pt x="4775675" y="3350268"/>
+                </a:lnTo>
+                <a:lnTo>
+                  <a:pt x="4814820" y="3353783"/>
+                </a:lnTo>
+                <a:lnTo>
+                  <a:pt x="4853965" y="3357206"/>
+                </a:lnTo>
+                <a:lnTo>
+                  <a:pt x="4893110" y="3360538"/>
+                </a:lnTo>
+                <a:lnTo>
+                  <a:pt x="4932255" y="3363783"/>
+                </a:lnTo>
+                <a:lnTo>
+                  <a:pt x="4971400" y="3366942"/>
+                </a:lnTo>
+                <a:lnTo>
+                  <a:pt x="5010545" y="3370017"/>
+                </a:lnTo>
+                <a:lnTo>
+                  <a:pt x="5049689" y="3373011"/>
+                </a:lnTo>
+                <a:lnTo>
+                  <a:pt x="5088834" y="3375926"/>
+                </a:lnTo>
+                <a:lnTo>
+                  <a:pt x="5127979" y="3378764"/>
+                </a:lnTo>
+                <a:lnTo>
+                  <a:pt x="5167124" y="3381528"/>
+                </a:lnTo>
+                <a:lnTo>
+                  <a:pt x="5206269" y="3384218"/>
+                </a:lnTo>
+                <a:lnTo>
+                  <a:pt x="5245414" y="3386837"/>
+                </a:lnTo>
+                <a:lnTo>
+                  <a:pt x="5284559" y="3389387"/>
+                </a:lnTo>
+                <a:lnTo>
+                  <a:pt x="5323704" y="3391870"/>
+                </a:lnTo>
+                <a:lnTo>
+                  <a:pt x="5362848" y="3394287"/>
+                </a:lnTo>
+                <a:lnTo>
+                  <a:pt x="5401993" y="3396641"/>
+                </a:lnTo>
+                <a:lnTo>
+                  <a:pt x="5441138" y="3398932"/>
+                </a:lnTo>
+                <a:lnTo>
+                  <a:pt x="5480283" y="3401163"/>
+                </a:lnTo>
+                <a:lnTo>
+                  <a:pt x="5519428" y="3403335"/>
+                </a:lnTo>
+                <a:lnTo>
+                  <a:pt x="5558573" y="3405449"/>
+                </a:lnTo>
+                <a:lnTo>
+                  <a:pt x="5597718" y="3407508"/>
+                </a:lnTo>
+                <a:lnTo>
+                  <a:pt x="5636863" y="3409512"/>
+                </a:lnTo>
+                <a:lnTo>
+                  <a:pt x="5676008" y="3411464"/>
+                </a:lnTo>
+                <a:lnTo>
+                  <a:pt x="5715152" y="3413364"/>
+                </a:lnTo>
+                <a:lnTo>
+                  <a:pt x="5754297" y="3415214"/>
+                </a:lnTo>
+                <a:lnTo>
+                  <a:pt x="5793442" y="3417015"/>
+                </a:lnTo>
+                <a:lnTo>
+                  <a:pt x="5832587" y="3418768"/>
+                </a:lnTo>
+                <a:lnTo>
+                  <a:pt x="5852160" y="3419627"/>
+                </a:lnTo>
+              </a:path>
+            </a:pathLst>
+          </a:custGeom>
+          <a:noFill/>
+          <a:ln w="43180">
+            <a:solidFill>
+              <a:srgbClr val="8EDBD4"/>
+            </a:solidFill>
+          </a:ln>
+          <a:effectLst/>
+        </p:spPr>
+        <p:txBody>
+          <a:bodyPr rtlCol="0" anchor="ctr"/>
+          <a:lstStyle/>
+          <a:p>
+            <a:pPr algn="ctr"/>
+          </a:p>
+        </p:txBody>
+      </p:sp>
+      <p:sp>
+        <p:nvSpPr>
+          <p:cNvPr id="36" name="A-E17 ellipse 34" descr="sci-ppt:o034"/>
+          <p:cNvSpPr/>
+          <p:nvPr/>
+        </p:nvSpPr>
+        <p:spPr>
+          <a:xfrm>
+            <a:off x="2304288" y="3674566"/>
+            <a:ext cx="146304" cy="146304"/>
+          </a:xfrm>
+          <a:prstGeom prst="ellipse">
+            <a:avLst/>
+          </a:prstGeom>
+          <a:solidFill>
+            <a:srgbClr val="F2B880"/>
+          </a:solidFill>
+          <a:ln w="12700">
+            <a:solidFill>
+              <a:srgbClr val="F2B880"/>
+            </a:solidFill>
+          </a:ln>
+          <a:effectLst/>
+        </p:spPr>
+        <p:txBody>
+          <a:bodyPr rtlCol="0" anchor="ctr"/>
+          <a:lstStyle/>
+          <a:p>
+            <a:pPr algn="ctr"/>
+          </a:p>
+        </p:txBody>
+      </p:sp>
+      <p:cxnSp>
+        <p:nvCxnSpPr>
+          <p:cNvPr id="37" name="A-E17 line 35" descr="sci-ppt:o035"/>
+          <p:cNvCxnSpPr/>
+          <p:nvPr/>
+        </p:nvCxnSpPr>
+        <p:spPr>
+          <a:xfrm>
+            <a:off x="2377440" y="1371600"/>
+            <a:ext cx="0" cy="3657600"/>
+          </a:xfrm>
+          <a:prstGeom prst="line">
+            <a:avLst/>
+          </a:prstGeom>
+          <a:ln w="16510">
+            <a:solidFill>
+              <a:srgbClr val="F2B880"/>
+            </a:solidFill>
+            <a:prstDash val="dash"/>
+          </a:ln>
+          <a:effectLst/>
+        </p:spPr>
+      </p:cxnSp>
+      <p:cxnSp>
+        <p:nvCxnSpPr>
+          <p:cNvPr id="38" name="A-E17 line 36" descr="sci-ppt:o036"/>
+          <p:cNvCxnSpPr/>
+          <p:nvPr/>
+        </p:nvCxnSpPr>
+        <p:spPr>
+          <a:xfrm>
+            <a:off x="914400" y="3747718"/>
+            <a:ext cx="5852160" cy="0"/>
+          </a:xfrm>
+          <a:prstGeom prst="line">
+            <a:avLst/>
+          </a:prstGeom>
+          <a:ln w="16510">
+            <a:solidFill>
+              <a:srgbClr val="B4C7D2"/>
+            </a:solidFill>
+            <a:prstDash val="dash"/>
+          </a:ln>
+          <a:effectLst/>
+        </p:spPr>
+      </p:cxnSp>
+      <p:sp>
+        <p:nvSpPr>
+          <p:cNvPr id="39" name="A-E17 text 37" descr="sci-ppt:o037"/>
+          <p:cNvSpPr txBox="1"/>
+          <p:nvPr/>
+        </p:nvSpPr>
+        <p:spPr>
+          <a:xfrm>
+            <a:off x="2514600" y="3290518"/>
+            <a:ext cx="1828800" cy="231648"/>
           </a:xfrm>
           <a:prstGeom prst="rect">
+            <a:avLst/>
+          </a:prstGeom>
+          <a:noFill/>
+          <a:effectLst/>
+        </p:spPr>
+        <p:txBody>
+          <a:bodyPr wrap="none" lIns="18288" rIns="18288" tIns="18288" bIns="18288" anchor="t">
+            <a:spAutoFit/>
+          </a:bodyPr>
+          <a:lstStyle/>
+          <a:p>
+            <a:pPr algn="l">
+              <a:spcAft>
+                <a:spcPts val="0"/>
+              </a:spcAft>
+            </a:pPr>
+            <a:r>
+              <a:rPr sz="1200" b="0" i="0">
+                <a:solidFill>
+                  <a:srgbClr val="F2B880"/>
+                </a:solidFill>
+                <a:latin typeface="Arial"/>
+              </a:rPr>
+              <a:t>1/e at t = τ_KV</a:t>
+            </a:r>
+          </a:p>
+        </p:txBody>
+      </p:sp>
+      <p:sp>
+        <p:nvSpPr>
+          <p:cNvPr id="40" name="A-E17 round_rect 38" descr="sci-ppt:o038"/>
+          <p:cNvSpPr/>
+          <p:nvPr/>
+        </p:nvSpPr>
+        <p:spPr>
+          <a:xfrm>
+            <a:off x="7040880" y="1371600"/>
+            <a:ext cx="4800600" cy="3657600"/>
+          </a:xfrm>
+          <a:prstGeom prst="roundRect">
             <a:avLst/>
           </a:prstGeom>
           <a:solidFill>
             <a:srgbClr val="213E4B"/>
           </a:solidFill>
-          <a:ln w="17780">
+          <a:ln w="20320">
             <a:solidFill>
-              <a:srgbClr val="B4C7D2"/>
+              <a:srgbClr val="8EDBD4"/>
             </a:solidFill>
           </a:ln>
           <a:effectLst/>
@@ -3210,14 +4681,14 @@
       </p:sp>
       <p:sp>
         <p:nvSpPr>
-          <p:cNvPr id="5" name="text 3" descr="sci-ppt:obj-003"/>
+          <p:cNvPr id="41" name="A-E17 text 39" descr="sci-ppt:o039"/>
           <p:cNvSpPr txBox="1"/>
           <p:nvPr/>
         </p:nvSpPr>
         <p:spPr>
           <a:xfrm>
-            <a:off x="1179576" y="1106424"/>
-            <a:ext cx="6492240" cy="310896"/>
+            <a:off x="7150608" y="1426464"/>
+            <a:ext cx="4581144" cy="254889"/>
           </a:xfrm>
           <a:prstGeom prst="rect">
             <a:avLst/>
@@ -3226,7 +4697,7 @@
           <a:effectLst/>
         </p:spPr>
         <p:txBody>
-          <a:bodyPr wrap="none" lIns="0" rIns="0" tIns="0" bIns="0" anchor="ctr">
+          <a:bodyPr wrap="none" lIns="18288" rIns="18288" tIns="18288" bIns="18288" anchor="t">
             <a:spAutoFit/>
           </a:bodyPr>
           <a:lstStyle/>
@@ -3237,59 +4708,67 @@
               </a:spcAft>
             </a:pPr>
             <a:r>
-              <a:rPr sz="1296" b="0" i="0">
+              <a:rPr sz="1350" b="1" i="0">
+                <a:solidFill>
+                  <a:srgbClr val="8EDBD4"/>
+                </a:solidFill>
+                <a:latin typeface="Arial"/>
+              </a:rPr>
+              <a:t>Kelvin–Voigt dashpot in shear</a:t>
+            </a:r>
+          </a:p>
+        </p:txBody>
+      </p:sp>
+      <p:sp>
+        <p:nvSpPr>
+          <p:cNvPr id="42" name="A-E17 text 40" descr="sci-ppt:o040"/>
+          <p:cNvSpPr txBox="1"/>
+          <p:nvPr/>
+        </p:nvSpPr>
+        <p:spPr>
+          <a:xfrm>
+            <a:off x="7178040" y="1828800"/>
+            <a:ext cx="4572000" cy="247142"/>
+          </a:xfrm>
+          <a:prstGeom prst="rect">
+            <a:avLst/>
+          </a:prstGeom>
+          <a:noFill/>
+          <a:effectLst/>
+        </p:spPr>
+        <p:txBody>
+          <a:bodyPr wrap="none" lIns="18288" rIns="18288" tIns="18288" bIns="18288" anchor="t">
+            <a:spAutoFit/>
+          </a:bodyPr>
+          <a:lstStyle/>
+          <a:p>
+            <a:pPr algn="l">
+              <a:spcAft>
+                <a:spcPts val="0"/>
+              </a:spcAft>
+            </a:pPr>
+            <a:r>
+              <a:rPr sz="1300" b="1" i="0">
                 <a:solidFill>
                   <a:srgbClr val="E7F0F3"/>
                 </a:solidFill>
                 <a:latin typeface="Arial"/>
               </a:rPr>
-              <a:t>Unloaded Kelvin–Voigt shear: Tsh = 0</a:t>
-            </a:r>
-          </a:p>
-        </p:txBody>
-      </p:sp>
-      <p:sp>
-        <p:nvSpPr>
-          <p:cNvPr id="6" name="rect 4" descr="sci-ppt:obj-004"/>
-          <p:cNvSpPr/>
-          <p:nvPr/>
-        </p:nvSpPr>
-        <p:spPr>
-          <a:xfrm>
-            <a:off x="996696" y="1645920"/>
-            <a:ext cx="6766560" cy="347472"/>
-          </a:xfrm>
-          <a:prstGeom prst="rect">
-            <a:avLst/>
-          </a:prstGeom>
-          <a:solidFill>
-            <a:srgbClr val="213E4B"/>
-          </a:solidFill>
-          <a:ln w="17780">
-            <a:solidFill>
-              <a:srgbClr val="B4C7D2"/>
-            </a:solidFill>
-          </a:ln>
-          <a:effectLst/>
-        </p:spPr>
-        <p:txBody>
-          <a:bodyPr rtlCol="0" anchor="ctr"/>
-          <a:lstStyle/>
-          <a:p>
-            <a:pPr algn="ctr"/>
-          </a:p>
-        </p:txBody>
-      </p:sp>
-      <p:sp>
-        <p:nvSpPr>
-          <p:cNvPr id="7" name="text 5" descr="sci-ppt:obj-005"/>
+              <a:t>Tₛₕ = G_g γ + η_g γ̇</a:t>
+            </a:r>
+          </a:p>
+        </p:txBody>
+      </p:sp>
+      <p:sp>
+        <p:nvSpPr>
+          <p:cNvPr id="43" name="A-E17 text 41" descr="sci-ppt:o041"/>
           <p:cNvSpPr txBox="1"/>
           <p:nvPr/>
         </p:nvSpPr>
         <p:spPr>
           <a:xfrm>
-            <a:off x="1179576" y="1682496"/>
-            <a:ext cx="6492240" cy="310896"/>
+            <a:off x="7178040" y="2331720"/>
+            <a:ext cx="4572000" cy="239395"/>
           </a:xfrm>
           <a:prstGeom prst="rect">
             <a:avLst/>
@@ -3298,7 +4777,7 @@
           <a:effectLst/>
         </p:spPr>
         <p:txBody>
-          <a:bodyPr wrap="none" lIns="0" rIns="0" tIns="0" bIns="0" anchor="ctr">
+          <a:bodyPr wrap="none" lIns="18288" rIns="18288" tIns="18288" bIns="18288" anchor="t">
             <a:spAutoFit/>
           </a:bodyPr>
           <a:lstStyle/>
@@ -3309,59 +4788,27 @@
               </a:spcAft>
             </a:pPr>
             <a:r>
-              <a:rPr sz="1296" b="0" i="0">
+              <a:rPr sz="1250" b="1" i="0">
                 <a:solidFill>
                   <a:srgbClr val="E7F0F3"/>
                 </a:solidFill>
                 <a:latin typeface="Arial"/>
               </a:rPr>
-              <a:t>Strain recovers after unloading</a:t>
-            </a:r>
-          </a:p>
-        </p:txBody>
-      </p:sp>
-      <p:sp>
-        <p:nvSpPr>
-          <p:cNvPr id="8" name="rect 6" descr="sci-ppt:obj-006"/>
-          <p:cNvSpPr/>
-          <p:nvPr/>
-        </p:nvSpPr>
-        <p:spPr>
-          <a:xfrm>
-            <a:off x="996696" y="2221992"/>
-            <a:ext cx="6766560" cy="347472"/>
-          </a:xfrm>
-          <a:prstGeom prst="rect">
-            <a:avLst/>
-          </a:prstGeom>
-          <a:solidFill>
-            <a:srgbClr val="213E4B"/>
-          </a:solidFill>
-          <a:ln w="17780">
-            <a:solidFill>
-              <a:srgbClr val="B4C7D2"/>
-            </a:solidFill>
-          </a:ln>
-          <a:effectLst/>
-        </p:spPr>
-        <p:txBody>
-          <a:bodyPr rtlCol="0" anchor="ctr"/>
-          <a:lstStyle/>
-          <a:p>
-            <a:pPr algn="ctr"/>
-          </a:p>
-        </p:txBody>
-      </p:sp>
-      <p:sp>
-        <p:nvSpPr>
-          <p:cNvPr id="9" name="text 7" descr="sci-ppt:obj-007"/>
+              <a:t>Tₛₕ = 0:  γ̇ = −(G_g/η_g) γ</a:t>
+            </a:r>
+          </a:p>
+        </p:txBody>
+      </p:sp>
+      <p:sp>
+        <p:nvSpPr>
+          <p:cNvPr id="44" name="A-E17 text 42" descr="sci-ppt:o042"/>
           <p:cNvSpPr txBox="1"/>
           <p:nvPr/>
         </p:nvSpPr>
         <p:spPr>
           <a:xfrm>
-            <a:off x="1179576" y="2258568"/>
-            <a:ext cx="6492240" cy="310896"/>
+            <a:off x="7178040" y="2834640"/>
+            <a:ext cx="4572000" cy="239395"/>
           </a:xfrm>
           <a:prstGeom prst="rect">
             <a:avLst/>
@@ -3370,7 +4817,7 @@
           <a:effectLst/>
         </p:spPr>
         <p:txBody>
-          <a:bodyPr wrap="none" lIns="0" rIns="0" tIns="0" bIns="0" anchor="ctr">
+          <a:bodyPr wrap="none" lIns="18288" rIns="18288" tIns="18288" bIns="18288" anchor="t">
             <a:spAutoFit/>
           </a:bodyPr>
           <a:lstStyle/>
@@ -3381,27 +4828,163 @@
               </a:spcAft>
             </a:pPr>
             <a:r>
-              <a:rPr sz="1296" b="0" i="0">
+              <a:rPr sz="1250" b="1" i="0">
+                <a:solidFill>
+                  <a:srgbClr val="F2B880"/>
+                </a:solidFill>
+                <a:latin typeface="Arial"/>
+              </a:rPr>
+              <a:t>γ = γ₀ exp(−t/τ_KV),   τ_KV = η_g/G_g</a:t>
+            </a:r>
+          </a:p>
+        </p:txBody>
+      </p:sp>
+      <p:sp>
+        <p:nvSpPr>
+          <p:cNvPr id="45" name="A-E17 text 43" descr="sci-ppt:o043"/>
+          <p:cNvSpPr txBox="1"/>
+          <p:nvPr/>
+        </p:nvSpPr>
+        <p:spPr>
+          <a:xfrm>
+            <a:off x="7178040" y="3383280"/>
+            <a:ext cx="4572000" cy="247142"/>
+          </a:xfrm>
+          <a:prstGeom prst="rect">
+            <a:avLst/>
+          </a:prstGeom>
+          <a:noFill/>
+          <a:effectLst/>
+        </p:spPr>
+        <p:txBody>
+          <a:bodyPr wrap="none" lIns="18288" rIns="18288" tIns="18288" bIns="18288" anchor="t">
+            <a:spAutoFit/>
+          </a:bodyPr>
+          <a:lstStyle/>
+          <a:p>
+            <a:pPr algn="l">
+              <a:spcAft>
+                <a:spcPts val="0"/>
+              </a:spcAft>
+            </a:pPr>
+            <a:r>
+              <a:rPr sz="1300" b="1" i="0">
+                <a:solidFill>
+                  <a:srgbClr val="F2B880"/>
+                </a:solidFill>
+                <a:latin typeface="Arial"/>
+              </a:rPr>
+              <a:t>τ_KV = 0.010 / 20 000 = 0.50 µs</a:t>
+            </a:r>
+          </a:p>
+        </p:txBody>
+      </p:sp>
+      <p:sp>
+        <p:nvSpPr>
+          <p:cNvPr id="46" name="A-E17 text 44" descr="sci-ppt:o044"/>
+          <p:cNvSpPr txBox="1"/>
+          <p:nvPr/>
+        </p:nvSpPr>
+        <p:spPr>
+          <a:xfrm>
+            <a:off x="7178040" y="3931920"/>
+            <a:ext cx="4572000" cy="402081"/>
+          </a:xfrm>
+          <a:prstGeom prst="rect">
+            <a:avLst/>
+          </a:prstGeom>
+          <a:noFill/>
+          <a:effectLst/>
+        </p:spPr>
+        <p:txBody>
+          <a:bodyPr wrap="none" lIns="18288" rIns="18288" tIns="18288" bIns="18288" anchor="t">
+            <a:spAutoFit/>
+          </a:bodyPr>
+          <a:lstStyle/>
+          <a:p>
+            <a:pPr algn="l">
+              <a:spcAft>
+                <a:spcPts val="0"/>
+              </a:spcAft>
+            </a:pPr>
+            <a:r>
+              <a:rPr sz="1150" b="0" i="0">
+                <a:solidFill>
+                  <a:srgbClr val="B4C7D2"/>
+                </a:solidFill>
+                <a:latin typeface="Arial"/>
+              </a:rPr>
+              <a:t>This is the recovery time after unloading; it is not a</a:t>
+            </a:r>
+          </a:p>
+          <a:p>
+            <a:pPr algn="l">
+              <a:spcAft>
+                <a:spcPts val="0"/>
+              </a:spcAft>
+            </a:pPr>
+            <a:r>
+              <a:rPr sz="1150" b="0" i="0">
+                <a:solidFill>
+                  <a:srgbClr val="B4C7D2"/>
+                </a:solidFill>
+                <a:latin typeface="Arial"/>
+              </a:rPr>
+              <a:t>relaxation time for stress under constant strain.</a:t>
+            </a:r>
+          </a:p>
+        </p:txBody>
+      </p:sp>
+      <p:sp>
+        <p:nvSpPr>
+          <p:cNvPr id="47" name="A-E17 text 45" descr="sci-ppt:o045"/>
+          <p:cNvSpPr txBox="1"/>
+          <p:nvPr/>
+        </p:nvSpPr>
+        <p:spPr>
+          <a:xfrm>
+            <a:off x="914400" y="5733288"/>
+            <a:ext cx="10972800" cy="239395"/>
+          </a:xfrm>
+          <a:prstGeom prst="rect">
+            <a:avLst/>
+          </a:prstGeom>
+          <a:noFill/>
+          <a:effectLst/>
+        </p:spPr>
+        <p:txBody>
+          <a:bodyPr wrap="none" lIns="18288" rIns="18288" tIns="18288" bIns="18288" anchor="t">
+            <a:spAutoFit/>
+          </a:bodyPr>
+          <a:lstStyle/>
+          <a:p>
+            <a:pPr algn="l">
+              <a:spcAft>
+                <a:spcPts val="0"/>
+              </a:spcAft>
+            </a:pPr>
+            <a:r>
+              <a:rPr sz="1250" b="0" i="0">
                 <a:solidFill>
                   <a:srgbClr val="E7F0F3"/>
                 </a:solidFill>
                 <a:latin typeface="Arial"/>
               </a:rPr>
-              <a:t>τKV = ηg / Gg</a:t>
-            </a:r>
-          </a:p>
-        </p:txBody>
-      </p:sp>
-      <p:sp>
-        <p:nvSpPr>
-          <p:cNvPr id="10" name="text 8" descr="sci-ppt:obj-008"/>
+              <a:t>A Kelvin–Voigt solid recovers strain exponentially; it cannot relax stress at constant strain, so τ_KV must not be reused as τᵣₑₗ.</a:t>
+            </a:r>
+          </a:p>
+        </p:txBody>
+      </p:sp>
+      <p:sp>
+        <p:nvSpPr>
+          <p:cNvPr id="48" name="A-E17 text 46" descr="sci-ppt:o046"/>
           <p:cNvSpPr txBox="1"/>
           <p:nvPr/>
         </p:nvSpPr>
         <p:spPr>
           <a:xfrm>
-            <a:off x="1005840" y="2862072"/>
-            <a:ext cx="7680960" cy="310896"/>
+            <a:off x="320040" y="6510528"/>
+            <a:ext cx="11521440" cy="200660"/>
           </a:xfrm>
           <a:prstGeom prst="rect">
             <a:avLst/>
@@ -3410,7 +4993,7 @@
           <a:effectLst/>
         </p:spPr>
         <p:txBody>
-          <a:bodyPr wrap="none" lIns="0" rIns="0" tIns="0" bIns="0" anchor="ctr">
+          <a:bodyPr wrap="none" lIns="18288" rIns="18288" tIns="18288" bIns="18288" anchor="t">
             <a:spAutoFit/>
           </a:bodyPr>
           <a:lstStyle/>
@@ -3421,333 +5004,13 @@
               </a:spcAft>
             </a:pPr>
             <a:r>
-              <a:rPr sz="1152" b="0" i="0">
+              <a:rPr sz="1000" b="0" i="0">
                 <a:solidFill>
-                  <a:srgbClr val="E7F0F3"/>
+                  <a:srgbClr val="B4C7D2"/>
                 </a:solidFill>
                 <a:latin typeface="Arial"/>
               </a:rPr>
-              <a:t>Equal boxes list definitions; lengths do not encode time</a:t>
-            </a:r>
-          </a:p>
-        </p:txBody>
-      </p:sp>
-      <p:sp>
-        <p:nvSpPr>
-          <p:cNvPr id="11" name="text 9" descr="sci-ppt:obj-009"/>
-          <p:cNvSpPr txBox="1"/>
-          <p:nvPr/>
-        </p:nvSpPr>
-        <p:spPr>
-          <a:xfrm>
-            <a:off x="256032" y="3465576"/>
-            <a:ext cx="7315200" cy="310896"/>
-          </a:xfrm>
-          <a:prstGeom prst="rect">
-            <a:avLst/>
-          </a:prstGeom>
-          <a:noFill/>
-          <a:effectLst/>
-        </p:spPr>
-        <p:txBody>
-          <a:bodyPr wrap="none" lIns="0" rIns="0" tIns="0" bIns="0" anchor="ctr">
-            <a:spAutoFit/>
-          </a:bodyPr>
-          <a:lstStyle/>
-          <a:p>
-            <a:pPr algn="l">
-              <a:spcAft>
-                <a:spcPts val="0"/>
-              </a:spcAft>
-            </a:pPr>
-            <a:r>
-              <a:rPr sz="1296" b="0" i="0">
-                <a:solidFill>
-                  <a:srgbClr val="8EDBD4"/>
-                </a:solidFill>
-                <a:latin typeface="Arial"/>
-              </a:rPr>
-              <a:t>Variables and physical limits</a:t>
-            </a:r>
-          </a:p>
-        </p:txBody>
-      </p:sp>
-      <p:sp>
-        <p:nvSpPr>
-          <p:cNvPr id="12" name="text 10" descr="sci-ppt:obj-010"/>
-          <p:cNvSpPr txBox="1"/>
-          <p:nvPr/>
-        </p:nvSpPr>
-        <p:spPr>
-          <a:xfrm>
-            <a:off x="365760" y="3813048"/>
-            <a:ext cx="8412480" cy="310896"/>
-          </a:xfrm>
-          <a:prstGeom prst="rect">
-            <a:avLst/>
-          </a:prstGeom>
-          <a:noFill/>
-          <a:effectLst/>
-        </p:spPr>
-        <p:txBody>
-          <a:bodyPr wrap="none" lIns="0" rIns="0" tIns="0" bIns="0" anchor="ctr">
-            <a:spAutoFit/>
-          </a:bodyPr>
-          <a:lstStyle/>
-          <a:p>
-            <a:pPr algn="l">
-              <a:spcAft>
-                <a:spcPts val="0"/>
-              </a:spcAft>
-            </a:pPr>
-            <a:r>
-              <a:rPr sz="1152" b="0" i="0">
-                <a:solidFill>
-                  <a:srgbClr val="E7F0F3"/>
-                </a:solidFill>
-                <a:latin typeface="Arial"/>
-              </a:rPr>
-              <a:t>• Tsh = 0 after unloading</a:t>
-            </a:r>
-          </a:p>
-        </p:txBody>
-      </p:sp>
-      <p:sp>
-        <p:nvSpPr>
-          <p:cNvPr id="13" name="text 11" descr="sci-ppt:obj-011"/>
-          <p:cNvSpPr txBox="1"/>
-          <p:nvPr/>
-        </p:nvSpPr>
-        <p:spPr>
-          <a:xfrm>
-            <a:off x="365760" y="4023360"/>
-            <a:ext cx="8412480" cy="310896"/>
-          </a:xfrm>
-          <a:prstGeom prst="rect">
-            <a:avLst/>
-          </a:prstGeom>
-          <a:noFill/>
-          <a:effectLst/>
-        </p:spPr>
-        <p:txBody>
-          <a:bodyPr wrap="none" lIns="0" rIns="0" tIns="0" bIns="0" anchor="ctr">
-            <a:spAutoFit/>
-          </a:bodyPr>
-          <a:lstStyle/>
-          <a:p>
-            <a:pPr algn="l">
-              <a:spcAft>
-                <a:spcPts val="0"/>
-              </a:spcAft>
-            </a:pPr>
-            <a:r>
-              <a:rPr sz="1152" b="0" i="0">
-                <a:solidFill>
-                  <a:srgbClr val="E7F0F3"/>
-                </a:solidFill>
-                <a:latin typeface="Arial"/>
-              </a:rPr>
-              <a:t>• γ₀ → γ(t)</a:t>
-            </a:r>
-          </a:p>
-        </p:txBody>
-      </p:sp>
-      <p:sp>
-        <p:nvSpPr>
-          <p:cNvPr id="14" name="text 12" descr="sci-ppt:obj-012"/>
-          <p:cNvSpPr txBox="1"/>
-          <p:nvPr/>
-        </p:nvSpPr>
-        <p:spPr>
-          <a:xfrm>
-            <a:off x="365760" y="4233672"/>
-            <a:ext cx="8412480" cy="310896"/>
-          </a:xfrm>
-          <a:prstGeom prst="rect">
-            <a:avLst/>
-          </a:prstGeom>
-          <a:noFill/>
-          <a:effectLst/>
-        </p:spPr>
-        <p:txBody>
-          <a:bodyPr wrap="none" lIns="0" rIns="0" tIns="0" bIns="0" anchor="ctr">
-            <a:spAutoFit/>
-          </a:bodyPr>
-          <a:lstStyle/>
-          <a:p>
-            <a:pPr algn="l">
-              <a:spcAft>
-                <a:spcPts val="0"/>
-              </a:spcAft>
-            </a:pPr>
-            <a:r>
-              <a:rPr sz="1152" b="0" i="0">
-                <a:solidFill>
-                  <a:srgbClr val="E7F0F3"/>
-                </a:solidFill>
-                <a:latin typeface="Arial"/>
-              </a:rPr>
-              <a:t>• Gg, ηg</a:t>
-            </a:r>
-          </a:p>
-        </p:txBody>
-      </p:sp>
-      <p:sp>
-        <p:nvSpPr>
-          <p:cNvPr id="15" name="text 13" descr="sci-ppt:obj-013"/>
-          <p:cNvSpPr txBox="1"/>
-          <p:nvPr/>
-        </p:nvSpPr>
-        <p:spPr>
-          <a:xfrm>
-            <a:off x="365760" y="4443984"/>
-            <a:ext cx="8412480" cy="310896"/>
-          </a:xfrm>
-          <a:prstGeom prst="rect">
-            <a:avLst/>
-          </a:prstGeom>
-          <a:noFill/>
-          <a:effectLst/>
-        </p:spPr>
-        <p:txBody>
-          <a:bodyPr wrap="none" lIns="0" rIns="0" tIns="0" bIns="0" anchor="ctr">
-            <a:spAutoFit/>
-          </a:bodyPr>
-          <a:lstStyle/>
-          <a:p>
-            <a:pPr algn="l">
-              <a:spcAft>
-                <a:spcPts val="0"/>
-              </a:spcAft>
-            </a:pPr>
-            <a:r>
-              <a:rPr sz="1152" b="0" i="0">
-                <a:solidFill>
-                  <a:srgbClr val="E7F0F3"/>
-                </a:solidFill>
-                <a:latin typeface="Arial"/>
-              </a:rPr>
-              <a:t>• τKV = ηg/Gg</a:t>
-            </a:r>
-          </a:p>
-        </p:txBody>
-      </p:sp>
-      <p:sp>
-        <p:nvSpPr>
-          <p:cNvPr id="16" name="text 14" descr="sci-ppt:obj-014"/>
-          <p:cNvSpPr txBox="1"/>
-          <p:nvPr/>
-        </p:nvSpPr>
-        <p:spPr>
-          <a:xfrm>
-            <a:off x="365760" y="4654296"/>
-            <a:ext cx="8412480" cy="310896"/>
-          </a:xfrm>
-          <a:prstGeom prst="rect">
-            <a:avLst/>
-          </a:prstGeom>
-          <a:noFill/>
-          <a:effectLst/>
-        </p:spPr>
-        <p:txBody>
-          <a:bodyPr wrap="none" lIns="0" rIns="0" tIns="0" bIns="0" anchor="ctr">
-            <a:spAutoFit/>
-          </a:bodyPr>
-          <a:lstStyle/>
-          <a:p>
-            <a:pPr algn="l">
-              <a:spcAft>
-                <a:spcPts val="0"/>
-              </a:spcAft>
-            </a:pPr>
-            <a:r>
-              <a:rPr sz="1152" b="0" i="0">
-                <a:solidFill>
-                  <a:srgbClr val="E7F0F3"/>
-                </a:solidFill>
-                <a:latin typeface="Arial"/>
-              </a:rPr>
-              <a:t>• γ̇, t</a:t>
-            </a:r>
-          </a:p>
-        </p:txBody>
-      </p:sp>
-      <p:sp>
-        <p:nvSpPr>
-          <p:cNvPr id="17" name="text 15" descr="sci-ppt:obj-015"/>
-          <p:cNvSpPr txBox="1"/>
-          <p:nvPr/>
-        </p:nvSpPr>
-        <p:spPr>
-          <a:xfrm>
-            <a:off x="365760" y="4864608"/>
-            <a:ext cx="8412480" cy="310896"/>
-          </a:xfrm>
-          <a:prstGeom prst="rect">
-            <a:avLst/>
-          </a:prstGeom>
-          <a:noFill/>
-          <a:effectLst/>
-        </p:spPr>
-        <p:txBody>
-          <a:bodyPr wrap="none" lIns="0" rIns="0" tIns="0" bIns="0" anchor="ctr">
-            <a:spAutoFit/>
-          </a:bodyPr>
-          <a:lstStyle/>
-          <a:p>
-            <a:pPr algn="l">
-              <a:spcAft>
-                <a:spcPts val="0"/>
-              </a:spcAft>
-            </a:pPr>
-            <a:r>
-              <a:rPr sz="1152" b="0" i="0">
-                <a:solidFill>
-                  <a:srgbClr val="E7F0F3"/>
-                </a:solidFill>
-                <a:latin typeface="Arial"/>
-              </a:rPr>
-              <a:t>Zero-stress strain recovery is not held-strain stress relaxation</a:t>
-            </a:r>
-          </a:p>
-        </p:txBody>
-      </p:sp>
-      <p:sp>
-        <p:nvSpPr>
-          <p:cNvPr id="18" name="text 16" descr="sci-ppt:obj-016"/>
-          <p:cNvSpPr txBox="1"/>
-          <p:nvPr/>
-        </p:nvSpPr>
-        <p:spPr>
-          <a:xfrm>
-            <a:off x="365760" y="5074920"/>
-            <a:ext cx="8412480" cy="310896"/>
-          </a:xfrm>
-          <a:prstGeom prst="rect">
-            <a:avLst/>
-          </a:prstGeom>
-          <a:noFill/>
-          <a:effectLst/>
-        </p:spPr>
-        <p:txBody>
-          <a:bodyPr wrap="none" lIns="0" rIns="0" tIns="0" bIns="0" anchor="ctr">
-            <a:spAutoFit/>
-          </a:bodyPr>
-          <a:lstStyle/>
-          <a:p>
-            <a:pPr algn="l">
-              <a:spcAft>
-                <a:spcPts val="0"/>
-              </a:spcAft>
-            </a:pPr>
-            <a:r>
-              <a:rPr sz="1152" b="0" i="0">
-                <a:solidFill>
-                  <a:srgbClr val="E7F0F3"/>
-                </a:solidFill>
-                <a:latin typeface="Arial"/>
-              </a:rPr>
-              <a:t>No periodic forcing is assumed</a:t>
+              <a:t>Linear constitutive check of Eq. A-E17 (G_g = 20 kPa, η_g = 0.010 Pa s).</a:t>
             </a:r>
           </a:p>
         </p:txBody>
